--- a/ZBC/THE PROPHETS.pptx
+++ b/ZBC/THE PROPHETS.pptx
@@ -29,6 +29,7 @@
     <p:sldId id="278" r:id="rId23"/>
     <p:sldId id="279" r:id="rId24"/>
     <p:sldId id="280" r:id="rId25"/>
+    <p:sldId id="281" r:id="rId26"/>
   </p:sldIdLst>
   <p:sldSz cx="12192000" cy="6858000"/>
   <p:notesSz cx="6858000" cy="9144000"/>
@@ -321,7 +322,7 @@
           <a:p>
             <a:fld id="{4AAD347D-5ACD-4C99-B74B-A9C85AD731AF}" type="datetimeFigureOut">
               <a:rPr lang="en-US" dirty="0"/>
-              <a:t>10/6/2026</a:t>
+              <a:t>10/14/2026</a:t>
             </a:fld>
             <a:endParaRPr lang="en-US" dirty="0"/>
           </a:p>
@@ -591,7 +592,7 @@
           <a:p>
             <a:fld id="{4509A250-FF31-4206-8172-F9D3106AACB1}" type="datetimeFigureOut">
               <a:rPr lang="en-US" dirty="0"/>
-              <a:t>10/6/2026</a:t>
+              <a:t>10/14/2026</a:t>
             </a:fld>
             <a:endParaRPr lang="en-US" dirty="0"/>
           </a:p>
@@ -780,7 +781,7 @@
           <a:p>
             <a:fld id="{4509A250-FF31-4206-8172-F9D3106AACB1}" type="datetimeFigureOut">
               <a:rPr lang="en-US" dirty="0"/>
-              <a:t>10/6/2026</a:t>
+              <a:t>10/14/2026</a:t>
             </a:fld>
             <a:endParaRPr lang="en-US" dirty="0"/>
           </a:p>
@@ -1048,7 +1049,7 @@
           <a:p>
             <a:fld id="{4509A250-FF31-4206-8172-F9D3106AACB1}" type="datetimeFigureOut">
               <a:rPr lang="en-US" dirty="0"/>
-              <a:t>10/6/2026</a:t>
+              <a:t>10/14/2026</a:t>
             </a:fld>
             <a:endParaRPr lang="en-US" dirty="0"/>
           </a:p>
@@ -1384,7 +1385,7 @@
           <a:p>
             <a:fld id="{4509A250-FF31-4206-8172-F9D3106AACB1}" type="datetimeFigureOut">
               <a:rPr lang="en-US" dirty="0"/>
-              <a:t>10/6/2026</a:t>
+              <a:t>10/14/2026</a:t>
             </a:fld>
             <a:endParaRPr lang="en-US" dirty="0"/>
           </a:p>
@@ -2002,7 +2003,7 @@
           <a:p>
             <a:fld id="{4509A250-FF31-4206-8172-F9D3106AACB1}" type="datetimeFigureOut">
               <a:rPr lang="en-US" dirty="0"/>
-              <a:t>10/6/2026</a:t>
+              <a:t>10/14/2026</a:t>
             </a:fld>
             <a:endParaRPr lang="en-US" dirty="0"/>
           </a:p>
@@ -2857,7 +2858,7 @@
           <a:p>
             <a:fld id="{4509A250-FF31-4206-8172-F9D3106AACB1}" type="datetimeFigureOut">
               <a:rPr lang="en-US" dirty="0"/>
-              <a:t>10/6/2026</a:t>
+              <a:t>10/14/2026</a:t>
             </a:fld>
             <a:endParaRPr lang="en-US" dirty="0"/>
           </a:p>
@@ -3022,7 +3023,7 @@
           <a:p>
             <a:fld id="{4509A250-FF31-4206-8172-F9D3106AACB1}" type="datetimeFigureOut">
               <a:rPr lang="en-US" dirty="0"/>
-              <a:t>10/6/2026</a:t>
+              <a:t>10/14/2026</a:t>
             </a:fld>
             <a:endParaRPr lang="en-US" dirty="0"/>
           </a:p>
@@ -3197,7 +3198,7 @@
           <a:p>
             <a:fld id="{4509A250-FF31-4206-8172-F9D3106AACB1}" type="datetimeFigureOut">
               <a:rPr lang="en-US" dirty="0"/>
-              <a:t>10/6/2026</a:t>
+              <a:t>10/14/2026</a:t>
             </a:fld>
             <a:endParaRPr lang="en-US" dirty="0"/>
           </a:p>
@@ -3362,7 +3363,7 @@
           <a:p>
             <a:fld id="{4509A250-FF31-4206-8172-F9D3106AACB1}" type="datetimeFigureOut">
               <a:rPr lang="en-US" dirty="0"/>
-              <a:t>10/6/2026</a:t>
+              <a:t>10/14/2026</a:t>
             </a:fld>
             <a:endParaRPr lang="en-US" dirty="0"/>
           </a:p>
@@ -3604,7 +3605,7 @@
           <a:p>
             <a:fld id="{9796027F-7875-4030-9381-8BD8C4F21935}" type="datetimeFigureOut">
               <a:rPr lang="en-US" dirty="0"/>
-              <a:t>10/6/2026</a:t>
+              <a:t>10/14/2026</a:t>
             </a:fld>
             <a:endParaRPr lang="en-US" dirty="0"/>
           </a:p>
@@ -3891,7 +3892,7 @@
           <a:p>
             <a:fld id="{9796027F-7875-4030-9381-8BD8C4F21935}" type="datetimeFigureOut">
               <a:rPr lang="en-US" dirty="0"/>
-              <a:t>10/6/2026</a:t>
+              <a:t>10/14/2026</a:t>
             </a:fld>
             <a:endParaRPr lang="en-US" dirty="0"/>
           </a:p>
@@ -4330,7 +4331,7 @@
           <a:p>
             <a:fld id="{9796027F-7875-4030-9381-8BD8C4F21935}" type="datetimeFigureOut">
               <a:rPr lang="en-US" dirty="0"/>
-              <a:t>10/6/2026</a:t>
+              <a:t>10/14/2026</a:t>
             </a:fld>
             <a:endParaRPr lang="en-US" dirty="0"/>
           </a:p>
@@ -4443,7 +4444,7 @@
           <a:p>
             <a:fld id="{4509A250-FF31-4206-8172-F9D3106AACB1}" type="datetimeFigureOut">
               <a:rPr lang="en-US" dirty="0"/>
-              <a:t>10/6/2026</a:t>
+              <a:t>10/14/2026</a:t>
             </a:fld>
             <a:endParaRPr lang="en-US" dirty="0"/>
           </a:p>
@@ -4533,7 +4534,7 @@
           <a:p>
             <a:fld id="{4509A250-FF31-4206-8172-F9D3106AACB1}" type="datetimeFigureOut">
               <a:rPr lang="en-US" dirty="0"/>
-              <a:t>10/6/2026</a:t>
+              <a:t>10/14/2026</a:t>
             </a:fld>
             <a:endParaRPr lang="en-US" dirty="0"/>
           </a:p>
@@ -4807,7 +4808,7 @@
           <a:p>
             <a:fld id="{4509A250-FF31-4206-8172-F9D3106AACB1}" type="datetimeFigureOut">
               <a:rPr lang="en-US" dirty="0"/>
-              <a:t>10/6/2026</a:t>
+              <a:t>10/14/2026</a:t>
             </a:fld>
             <a:endParaRPr lang="en-US" dirty="0"/>
           </a:p>
@@ -5077,7 +5078,7 @@
           <a:p>
             <a:fld id="{4509A250-FF31-4206-8172-F9D3106AACB1}" type="datetimeFigureOut">
               <a:rPr lang="en-US" dirty="0"/>
-              <a:t>10/6/2026</a:t>
+              <a:t>10/14/2026</a:t>
             </a:fld>
             <a:endParaRPr lang="en-US" dirty="0"/>
           </a:p>
@@ -5501,7 +5502,7 @@
           <a:p>
             <a:fld id="{4AAD347D-5ACD-4C99-B74B-A9C85AD731AF}" type="datetimeFigureOut">
               <a:rPr lang="en-US" dirty="0"/>
-              <a:t>10/6/2026</a:t>
+              <a:t>10/14/2026</a:t>
             </a:fld>
             <a:endParaRPr lang="en-US" dirty="0"/>
           </a:p>
@@ -18211,15 +18212,7 @@
           <a:p>
             <a:r>
               <a:rPr lang="en-US" dirty="0" smtClean="0"/>
-              <a:t>2. There is no proved example in the old testament </a:t>
-            </a:r>
-            <a:r>
-              <a:rPr lang="en-US" dirty="0" smtClean="0"/>
-              <a:t>of anonymous </a:t>
-            </a:r>
-            <a:r>
-              <a:rPr lang="en-US" dirty="0" smtClean="0"/>
-              <a:t>prophetic writing.</a:t>
+              <a:t>2. There is no proved example in the old testament of anonymous prophetic writing.</a:t>
             </a:r>
           </a:p>
           <a:p>
@@ -22502,6 +22495,95 @@
       <p:bldP spid="3" grpId="0" build="p"/>
     </p:bldLst>
   </p:timing>
+</p:sld>
+</file>
+
+<file path=ppt/slides/slide25.xml><?xml version="1.0" encoding="utf-8"?>
+<p:sld xmlns:a="http://schemas.openxmlformats.org/drawingml/2006/main" xmlns:r="http://schemas.openxmlformats.org/officeDocument/2006/relationships" xmlns:p="http://schemas.openxmlformats.org/presentationml/2006/main">
+  <p:cSld>
+    <p:spTree>
+      <p:nvGrpSpPr>
+        <p:cNvPr id="1" name=""/>
+        <p:cNvGrpSpPr/>
+        <p:nvPr/>
+      </p:nvGrpSpPr>
+      <p:grpSpPr>
+        <a:xfrm>
+          <a:off x="0" y="0"/>
+          <a:ext cx="0" cy="0"/>
+          <a:chOff x="0" y="0"/>
+          <a:chExt cx="0" cy="0"/>
+        </a:xfrm>
+      </p:grpSpPr>
+      <p:sp>
+        <p:nvSpPr>
+          <p:cNvPr id="2" name="Title 1"/>
+          <p:cNvSpPr>
+            <a:spLocks noGrp="1"/>
+          </p:cNvSpPr>
+          <p:nvPr>
+            <p:ph type="title"/>
+          </p:nvPr>
+        </p:nvSpPr>
+        <p:spPr/>
+        <p:txBody>
+          <a:bodyPr/>
+          <a:lstStyle/>
+          <a:p>
+            <a:pPr algn="ctr"/>
+            <a:r>
+              <a:rPr lang="en-US" dirty="0" smtClean="0"/>
+              <a:t>MICAH</a:t>
+            </a:r>
+            <a:endParaRPr lang="en-IN" dirty="0"/>
+          </a:p>
+        </p:txBody>
+      </p:sp>
+      <p:sp>
+        <p:nvSpPr>
+          <p:cNvPr id="3" name="Content Placeholder 2"/>
+          <p:cNvSpPr>
+            <a:spLocks noGrp="1"/>
+          </p:cNvSpPr>
+          <p:nvPr>
+            <p:ph idx="1"/>
+          </p:nvPr>
+        </p:nvSpPr>
+        <p:spPr/>
+        <p:txBody>
+          <a:bodyPr/>
+          <a:lstStyle/>
+          <a:p>
+            <a:r>
+              <a:rPr lang="en-US" dirty="0" smtClean="0"/>
+              <a:t>BACKGROUND</a:t>
+            </a:r>
+          </a:p>
+          <a:p>
+            <a:r>
+              <a:rPr lang="en-US" dirty="0" smtClean="0"/>
+              <a:t>Micah 1: </a:t>
+            </a:r>
+            <a:r>
+              <a:rPr lang="en-US" smtClean="0"/>
+              <a:t>1 Jeremiah 26: 18</a:t>
+            </a:r>
+          </a:p>
+          <a:p>
+            <a:endParaRPr lang="en-IN" dirty="0"/>
+          </a:p>
+        </p:txBody>
+      </p:sp>
+    </p:spTree>
+    <p:extLst>
+      <p:ext uri="{BB962C8B-B14F-4D97-AF65-F5344CB8AC3E}">
+        <p14:creationId xmlns:p14="http://schemas.microsoft.com/office/powerpoint/2010/main" val="486274409"/>
+      </p:ext>
+    </p:extLst>
+  </p:cSld>
+  <p:clrMapOvr>
+    <a:masterClrMapping/>
+  </p:clrMapOvr>
 </p:sld>
 </file>
 
